--- a/보고서/PPT/6조_1차프로젝트_계획_보고서_발표_수정4.pptx
+++ b/보고서/PPT/6조_1차프로젝트_계획_보고서_발표_수정4.pptx
@@ -291,7 +291,7 @@
           <a:p>
             <a:fld id="{3FB245E4-741B-46A9-94D1-0E241DD65ACD}" type="datetimeFigureOut">
               <a:rPr lang="ko-KR" altLang="en-US" smtClean="0"/>
-              <a:t>2024-07-13</a:t>
+              <a:t>2024-07-14</a:t>
             </a:fld>
             <a:endParaRPr lang="ko-KR" altLang="en-US"/>
           </a:p>
@@ -489,7 +489,7 @@
           <a:p>
             <a:fld id="{3FB245E4-741B-46A9-94D1-0E241DD65ACD}" type="datetimeFigureOut">
               <a:rPr lang="ko-KR" altLang="en-US" smtClean="0"/>
-              <a:t>2024-07-13</a:t>
+              <a:t>2024-07-14</a:t>
             </a:fld>
             <a:endParaRPr lang="ko-KR" altLang="en-US"/>
           </a:p>
@@ -697,7 +697,7 @@
           <a:p>
             <a:fld id="{3FB245E4-741B-46A9-94D1-0E241DD65ACD}" type="datetimeFigureOut">
               <a:rPr lang="ko-KR" altLang="en-US" smtClean="0"/>
-              <a:t>2024-07-13</a:t>
+              <a:t>2024-07-14</a:t>
             </a:fld>
             <a:endParaRPr lang="ko-KR" altLang="en-US"/>
           </a:p>
@@ -1121,7 +1121,7 @@
           <a:p>
             <a:fld id="{3FB245E4-741B-46A9-94D1-0E241DD65ACD}" type="datetimeFigureOut">
               <a:rPr lang="ko-KR" altLang="en-US" smtClean="0"/>
-              <a:t>2024-07-13</a:t>
+              <a:t>2024-07-14</a:t>
             </a:fld>
             <a:endParaRPr lang="ko-KR" altLang="en-US"/>
           </a:p>
@@ -1396,7 +1396,7 @@
           <a:p>
             <a:fld id="{3FB245E4-741B-46A9-94D1-0E241DD65ACD}" type="datetimeFigureOut">
               <a:rPr lang="ko-KR" altLang="en-US" smtClean="0"/>
-              <a:t>2024-07-13</a:t>
+              <a:t>2024-07-14</a:t>
             </a:fld>
             <a:endParaRPr lang="ko-KR" altLang="en-US"/>
           </a:p>
@@ -1661,7 +1661,7 @@
           <a:p>
             <a:fld id="{3FB245E4-741B-46A9-94D1-0E241DD65ACD}" type="datetimeFigureOut">
               <a:rPr lang="ko-KR" altLang="en-US" smtClean="0"/>
-              <a:t>2024-07-13</a:t>
+              <a:t>2024-07-14</a:t>
             </a:fld>
             <a:endParaRPr lang="ko-KR" altLang="en-US"/>
           </a:p>
@@ -2073,7 +2073,7 @@
           <a:p>
             <a:fld id="{3FB245E4-741B-46A9-94D1-0E241DD65ACD}" type="datetimeFigureOut">
               <a:rPr lang="ko-KR" altLang="en-US" smtClean="0"/>
-              <a:t>2024-07-13</a:t>
+              <a:t>2024-07-14</a:t>
             </a:fld>
             <a:endParaRPr lang="ko-KR" altLang="en-US"/>
           </a:p>
@@ -2214,7 +2214,7 @@
           <a:p>
             <a:fld id="{3FB245E4-741B-46A9-94D1-0E241DD65ACD}" type="datetimeFigureOut">
               <a:rPr lang="ko-KR" altLang="en-US" smtClean="0"/>
-              <a:t>2024-07-13</a:t>
+              <a:t>2024-07-14</a:t>
             </a:fld>
             <a:endParaRPr lang="ko-KR" altLang="en-US"/>
           </a:p>
@@ -2327,7 +2327,7 @@
           <a:p>
             <a:fld id="{3FB245E4-741B-46A9-94D1-0E241DD65ACD}" type="datetimeFigureOut">
               <a:rPr lang="ko-KR" altLang="en-US" smtClean="0"/>
-              <a:t>2024-07-13</a:t>
+              <a:t>2024-07-14</a:t>
             </a:fld>
             <a:endParaRPr lang="ko-KR" altLang="en-US"/>
           </a:p>
@@ -2638,7 +2638,7 @@
           <a:p>
             <a:fld id="{3FB245E4-741B-46A9-94D1-0E241DD65ACD}" type="datetimeFigureOut">
               <a:rPr lang="ko-KR" altLang="en-US" smtClean="0"/>
-              <a:t>2024-07-13</a:t>
+              <a:t>2024-07-14</a:t>
             </a:fld>
             <a:endParaRPr lang="ko-KR" altLang="en-US"/>
           </a:p>
@@ -2926,7 +2926,7 @@
           <a:p>
             <a:fld id="{3FB245E4-741B-46A9-94D1-0E241DD65ACD}" type="datetimeFigureOut">
               <a:rPr lang="ko-KR" altLang="en-US" smtClean="0"/>
-              <a:t>2024-07-13</a:t>
+              <a:t>2024-07-14</a:t>
             </a:fld>
             <a:endParaRPr lang="ko-KR" altLang="en-US"/>
           </a:p>
@@ -3167,7 +3167,7 @@
           <a:p>
             <a:fld id="{3FB245E4-741B-46A9-94D1-0E241DD65ACD}" type="datetimeFigureOut">
               <a:rPr lang="ko-KR" altLang="en-US" smtClean="0"/>
-              <a:t>2024-07-13</a:t>
+              <a:t>2024-07-14</a:t>
             </a:fld>
             <a:endParaRPr lang="ko-KR" altLang="en-US"/>
           </a:p>
@@ -4981,28 +4981,7 @@
                   <a:latin typeface="맑은 고딕" panose="020B0503020000020004" pitchFamily="50" charset="-127"/>
                   <a:ea typeface="맑은 고딕" panose="020B0503020000020004" pitchFamily="50" charset="-127"/>
                 </a:rPr>
-                <a:t>   미정 </a:t>
-              </a:r>
-              <a:r>
-                <a:rPr lang="en-US" altLang="ko-KR" sz="2400" b="1" dirty="0">
-                  <a:ln>
-                    <a:solidFill>
-                      <a:schemeClr val="accent1">
-                        <a:shade val="15000"/>
-                        <a:alpha val="0"/>
-                      </a:schemeClr>
-                    </a:solidFill>
-                  </a:ln>
-                  <a:solidFill>
-                    <a:schemeClr val="tx1">
-                      <a:lumMod val="75000"/>
-                      <a:lumOff val="25000"/>
-                    </a:schemeClr>
-                  </a:solidFill>
-                  <a:latin typeface="맑은 고딕" panose="020B0503020000020004" pitchFamily="50" charset="-127"/>
-                  <a:ea typeface="맑은 고딕" panose="020B0503020000020004" pitchFamily="50" charset="-127"/>
-                </a:rPr>
-                <a:t>(</a:t>
+                <a:t>   </a:t>
               </a:r>
               <a:r>
                 <a:rPr lang="ko-KR" altLang="en-US" sz="2400" b="1" dirty="0" err="1">
@@ -5023,29 +5002,26 @@
                   <a:latin typeface="맑은 고딕" panose="020B0503020000020004" pitchFamily="50" charset="-127"/>
                   <a:ea typeface="맑은 고딕" panose="020B0503020000020004" pitchFamily="50" charset="-127"/>
                 </a:rPr>
-                <a:t>팀명</a:t>
+                <a:t>김김이</a:t>
               </a:r>
-              <a:r>
-                <a:rPr lang="en-US" altLang="ko-KR" sz="2400" b="1" dirty="0">
-                  <a:ln>
-                    <a:solidFill>
-                      <a:schemeClr val="accent1">
-                        <a:shade val="15000"/>
-                        <a:alpha val="0"/>
-                      </a:schemeClr>
-                    </a:solidFill>
-                  </a:ln>
+              <a:endParaRPr lang="en-US" altLang="ko-KR" sz="2400" b="1" dirty="0">
+                <a:ln>
                   <a:solidFill>
-                    <a:schemeClr val="tx1">
-                      <a:lumMod val="75000"/>
-                      <a:lumOff val="25000"/>
+                    <a:schemeClr val="accent1">
+                      <a:shade val="15000"/>
+                      <a:alpha val="0"/>
                     </a:schemeClr>
                   </a:solidFill>
-                  <a:latin typeface="맑은 고딕" panose="020B0503020000020004" pitchFamily="50" charset="-127"/>
-                  <a:ea typeface="맑은 고딕" panose="020B0503020000020004" pitchFamily="50" charset="-127"/>
-                </a:rPr>
-                <a:t>)</a:t>
-              </a:r>
+                </a:ln>
+                <a:solidFill>
+                  <a:schemeClr val="tx1">
+                    <a:lumMod val="75000"/>
+                    <a:lumOff val="25000"/>
+                  </a:schemeClr>
+                </a:solidFill>
+                <a:latin typeface="맑은 고딕" panose="020B0503020000020004" pitchFamily="50" charset="-127"/>
+                <a:ea typeface="맑은 고딕" panose="020B0503020000020004" pitchFamily="50" charset="-127"/>
+              </a:endParaRPr>
             </a:p>
             <a:p>
               <a:pPr eaLnBrk="1" fontAlgn="auto" latinLnBrk="1" hangingPunct="1">

--- a/보고서/PPT/6조_1차프로젝트_계획_보고서_발표_수정4.pptx
+++ b/보고서/PPT/6조_1차프로젝트_계획_보고서_발표_수정4.pptx
@@ -11630,8 +11630,41 @@
                   <a:latin typeface="맑은 고딕" panose="020B0503020000020004" pitchFamily="50" charset="-127"/>
                   <a:ea typeface="맑은 고딕" panose="020B0503020000020004" pitchFamily="50" charset="-127"/>
                 </a:rPr>
-                <a:t>조</a:t>
+                <a:t>조 </a:t>
               </a:r>
+              <a:r>
+                <a:rPr lang="ko-KR" altLang="en-US" sz="1400" b="1" dirty="0" err="1">
+                  <a:ln>
+                    <a:solidFill>
+                      <a:schemeClr val="accent1">
+                        <a:shade val="15000"/>
+                        <a:alpha val="0"/>
+                      </a:schemeClr>
+                    </a:solidFill>
+                  </a:ln>
+                  <a:solidFill>
+                    <a:schemeClr val="bg1"/>
+                  </a:solidFill>
+                  <a:latin typeface="맑은 고딕" panose="020B0503020000020004" pitchFamily="50" charset="-127"/>
+                  <a:ea typeface="맑은 고딕" panose="020B0503020000020004" pitchFamily="50" charset="-127"/>
+                </a:rPr>
+                <a:t>김김이</a:t>
+              </a:r>
+              <a:endParaRPr lang="ko-KR" altLang="en-US" sz="1400" b="1" dirty="0">
+                <a:ln>
+                  <a:solidFill>
+                    <a:schemeClr val="accent1">
+                      <a:shade val="15000"/>
+                      <a:alpha val="0"/>
+                    </a:schemeClr>
+                  </a:solidFill>
+                </a:ln>
+                <a:solidFill>
+                  <a:schemeClr val="bg1"/>
+                </a:solidFill>
+                <a:latin typeface="맑은 고딕" panose="020B0503020000020004" pitchFamily="50" charset="-127"/>
+                <a:ea typeface="맑은 고딕" panose="020B0503020000020004" pitchFamily="50" charset="-127"/>
+              </a:endParaRPr>
             </a:p>
           </p:txBody>
         </p:sp>
